--- a/SPORTS_HUB_배포_및_운영_프로세스_흐름도.pptx
+++ b/SPORTS_HUB_배포_및_운영_프로세스_흐름도.pptx
@@ -3313,7 +3313,7 @@
               </a:defRPr>
             </a:pPr>
             <a:r>
-              <a:t>• 작성 버전: v2.2.0 (실시간 문자중계 연동 &amp; K리그 라이브 반영)  |  작성일: 2026-09-19</a:t>
+              <a:t>• 작성 버전: v2.3.0 (스마트 캐시 &amp; LIVE 안전 판정 &amp; 중계 모달 고도화)  |  작성일: 2026-09-20</a:t>
             </a:r>
           </a:p>
         </p:txBody>

--- a/SPORTS_HUB_배포_및_운영_프로세스_흐름도.pptx
+++ b/SPORTS_HUB_배포_및_운영_프로세스_흐름도.pptx
@@ -3313,7 +3313,7 @@
               </a:defRPr>
             </a:pPr>
             <a:r>
-              <a:t>• 작성 버전: v2.3.0 (스마트 캐시 &amp; LIVE 안전 판정 &amp; 중계 모달 고도화)  |  작성일: 2026-09-20</a:t>
+              <a:t>• 작성 버전: v2.4.0 (서버 타임존 캐시 동기화 &amp; 실시간 매치업 고도화)  |  작성일: 2026-09-20</a:t>
             </a:r>
           </a:p>
         </p:txBody>
